--- a/Figs/GemcitabinePaper_Figures.pptx
+++ b/Figs/GemcitabinePaper_Figures.pptx
@@ -5,7 +5,12 @@
     <p:sldMasterId id="2147483648" r:id="rId1"/>
   </p:sldMasterIdLst>
   <p:sldIdLst>
-    <p:sldId id="256" r:id="rId2"/>
+    <p:sldId id="258" r:id="rId2"/>
+    <p:sldId id="256" r:id="rId3"/>
+    <p:sldId id="257" r:id="rId4"/>
+    <p:sldId id="259" r:id="rId5"/>
+    <p:sldId id="260" r:id="rId6"/>
+    <p:sldId id="261" r:id="rId7"/>
   </p:sldIdLst>
   <p:sldSz cx="12192000" cy="6858000"/>
   <p:notesSz cx="6858000" cy="9144000"/>
@@ -104,6 +109,11 @@
       </a:defRPr>
     </a:lvl9pPr>
   </p:defaultTextStyle>
+  <p:extLst>
+    <p:ext uri="{EFAFB233-063F-42B5-8137-9DF3F51BA10A}">
+      <p15:sldGuideLst xmlns:p15="http://schemas.microsoft.com/office/powerpoint/2012/main"/>
+    </p:ext>
+  </p:extLst>
 </p:presentation>
 </file>
 
@@ -254,7 +264,7 @@
           <a:p>
             <a:fld id="{FA5DAE86-69C4-0D4D-B54F-2D0B7B3FA500}" type="datetimeFigureOut">
               <a:rPr lang="en-US" smtClean="0"/>
-              <a:t>5/16/23</a:t>
+              <a:t>5/17/23</a:t>
             </a:fld>
             <a:endParaRPr lang="en-US"/>
           </a:p>
@@ -452,7 +462,7 @@
           <a:p>
             <a:fld id="{FA5DAE86-69C4-0D4D-B54F-2D0B7B3FA500}" type="datetimeFigureOut">
               <a:rPr lang="en-US" smtClean="0"/>
-              <a:t>5/16/23</a:t>
+              <a:t>5/17/23</a:t>
             </a:fld>
             <a:endParaRPr lang="en-US"/>
           </a:p>
@@ -660,7 +670,7 @@
           <a:p>
             <a:fld id="{FA5DAE86-69C4-0D4D-B54F-2D0B7B3FA500}" type="datetimeFigureOut">
               <a:rPr lang="en-US" smtClean="0"/>
-              <a:t>5/16/23</a:t>
+              <a:t>5/17/23</a:t>
             </a:fld>
             <a:endParaRPr lang="en-US"/>
           </a:p>
@@ -858,7 +868,7 @@
           <a:p>
             <a:fld id="{FA5DAE86-69C4-0D4D-B54F-2D0B7B3FA500}" type="datetimeFigureOut">
               <a:rPr lang="en-US" smtClean="0"/>
-              <a:t>5/16/23</a:t>
+              <a:t>5/17/23</a:t>
             </a:fld>
             <a:endParaRPr lang="en-US"/>
           </a:p>
@@ -1133,7 +1143,7 @@
           <a:p>
             <a:fld id="{FA5DAE86-69C4-0D4D-B54F-2D0B7B3FA500}" type="datetimeFigureOut">
               <a:rPr lang="en-US" smtClean="0"/>
-              <a:t>5/16/23</a:t>
+              <a:t>5/17/23</a:t>
             </a:fld>
             <a:endParaRPr lang="en-US"/>
           </a:p>
@@ -1398,7 +1408,7 @@
           <a:p>
             <a:fld id="{FA5DAE86-69C4-0D4D-B54F-2D0B7B3FA500}" type="datetimeFigureOut">
               <a:rPr lang="en-US" smtClean="0"/>
-              <a:t>5/16/23</a:t>
+              <a:t>5/17/23</a:t>
             </a:fld>
             <a:endParaRPr lang="en-US"/>
           </a:p>
@@ -1810,7 +1820,7 @@
           <a:p>
             <a:fld id="{FA5DAE86-69C4-0D4D-B54F-2D0B7B3FA500}" type="datetimeFigureOut">
               <a:rPr lang="en-US" smtClean="0"/>
-              <a:t>5/16/23</a:t>
+              <a:t>5/17/23</a:t>
             </a:fld>
             <a:endParaRPr lang="en-US"/>
           </a:p>
@@ -1951,7 +1961,7 @@
           <a:p>
             <a:fld id="{FA5DAE86-69C4-0D4D-B54F-2D0B7B3FA500}" type="datetimeFigureOut">
               <a:rPr lang="en-US" smtClean="0"/>
-              <a:t>5/16/23</a:t>
+              <a:t>5/17/23</a:t>
             </a:fld>
             <a:endParaRPr lang="en-US"/>
           </a:p>
@@ -2064,7 +2074,7 @@
           <a:p>
             <a:fld id="{FA5DAE86-69C4-0D4D-B54F-2D0B7B3FA500}" type="datetimeFigureOut">
               <a:rPr lang="en-US" smtClean="0"/>
-              <a:t>5/16/23</a:t>
+              <a:t>5/17/23</a:t>
             </a:fld>
             <a:endParaRPr lang="en-US"/>
           </a:p>
@@ -2375,7 +2385,7 @@
           <a:p>
             <a:fld id="{FA5DAE86-69C4-0D4D-B54F-2D0B7B3FA500}" type="datetimeFigureOut">
               <a:rPr lang="en-US" smtClean="0"/>
-              <a:t>5/16/23</a:t>
+              <a:t>5/17/23</a:t>
             </a:fld>
             <a:endParaRPr lang="en-US"/>
           </a:p>
@@ -2663,7 +2673,7 @@
           <a:p>
             <a:fld id="{FA5DAE86-69C4-0D4D-B54F-2D0B7B3FA500}" type="datetimeFigureOut">
               <a:rPr lang="en-US" smtClean="0"/>
-              <a:t>5/16/23</a:t>
+              <a:t>5/17/23</a:t>
             </a:fld>
             <a:endParaRPr lang="en-US"/>
           </a:p>
@@ -2904,7 +2914,7 @@
           <a:p>
             <a:fld id="{FA5DAE86-69C4-0D4D-B54F-2D0B7B3FA500}" type="datetimeFigureOut">
               <a:rPr lang="en-US" smtClean="0"/>
-              <a:t>5/16/23</a:t>
+              <a:t>5/17/23</a:t>
             </a:fld>
             <a:endParaRPr lang="en-US"/>
           </a:p>
@@ -3321,6 +3331,89 @@
           <a:chExt cx="0" cy="0"/>
         </a:xfrm>
       </p:grpSpPr>
+      <p:sp>
+        <p:nvSpPr>
+          <p:cNvPr id="2" name="Title 1">
+            <a:extLst>
+              <a:ext uri="{FF2B5EF4-FFF2-40B4-BE49-F238E27FC236}">
+                <a16:creationId xmlns:a16="http://schemas.microsoft.com/office/drawing/2014/main" id="{21B2B337-4594-728E-9807-0F7A04A9A00D}"/>
+              </a:ext>
+            </a:extLst>
+          </p:cNvPr>
+          <p:cNvSpPr>
+            <a:spLocks noGrp="1"/>
+          </p:cNvSpPr>
+          <p:nvPr>
+            <p:ph type="ctrTitle"/>
+          </p:nvPr>
+        </p:nvSpPr>
+        <p:spPr/>
+        <p:txBody>
+          <a:bodyPr/>
+          <a:lstStyle/>
+          <a:p>
+            <a:r>
+              <a:rPr lang="en-US" dirty="0"/>
+              <a:t>Main Figures</a:t>
+            </a:r>
+          </a:p>
+        </p:txBody>
+      </p:sp>
+      <p:sp>
+        <p:nvSpPr>
+          <p:cNvPr id="3" name="Subtitle 2">
+            <a:extLst>
+              <a:ext uri="{FF2B5EF4-FFF2-40B4-BE49-F238E27FC236}">
+                <a16:creationId xmlns:a16="http://schemas.microsoft.com/office/drawing/2014/main" id="{C44CE9B4-FE41-DA3F-B756-BBFB9E341ABA}"/>
+              </a:ext>
+            </a:extLst>
+          </p:cNvPr>
+          <p:cNvSpPr>
+            <a:spLocks noGrp="1"/>
+          </p:cNvSpPr>
+          <p:nvPr>
+            <p:ph type="subTitle" idx="1"/>
+          </p:nvPr>
+        </p:nvSpPr>
+        <p:spPr/>
+        <p:txBody>
+          <a:bodyPr/>
+          <a:lstStyle/>
+          <a:p>
+            <a:endParaRPr lang="en-US"/>
+          </a:p>
+        </p:txBody>
+      </p:sp>
+    </p:spTree>
+    <p:extLst>
+      <p:ext uri="{BB962C8B-B14F-4D97-AF65-F5344CB8AC3E}">
+        <p14:creationId xmlns:p14="http://schemas.microsoft.com/office/powerpoint/2010/main" val="2810131983"/>
+      </p:ext>
+    </p:extLst>
+  </p:cSld>
+  <p:clrMapOvr>
+    <a:masterClrMapping/>
+  </p:clrMapOvr>
+</p:sld>
+</file>
+
+<file path=ppt/slides/slide2.xml><?xml version="1.0" encoding="utf-8"?>
+<p:sld xmlns:a="http://schemas.openxmlformats.org/drawingml/2006/main" xmlns:r="http://schemas.openxmlformats.org/officeDocument/2006/relationships" xmlns:p="http://schemas.openxmlformats.org/presentationml/2006/main">
+  <p:cSld>
+    <p:spTree>
+      <p:nvGrpSpPr>
+        <p:cNvPr id="1" name=""/>
+        <p:cNvGrpSpPr/>
+        <p:nvPr/>
+      </p:nvGrpSpPr>
+      <p:grpSpPr>
+        <a:xfrm>
+          <a:off x="0" y="0"/>
+          <a:ext cx="0" cy="0"/>
+          <a:chOff x="0" y="0"/>
+          <a:chExt cx="0" cy="0"/>
+        </a:xfrm>
+      </p:grpSpPr>
       <p:pic>
         <p:nvPicPr>
           <p:cNvPr id="7" name="Picture 6" descr="A picture containing line, diagram, plot, text&#10;&#10;Description automatically generated">
@@ -3669,6 +3762,697 @@
     <p:extLst>
       <p:ext uri="{BB962C8B-B14F-4D97-AF65-F5344CB8AC3E}">
         <p14:creationId xmlns:p14="http://schemas.microsoft.com/office/powerpoint/2010/main" val="3913484993"/>
+      </p:ext>
+    </p:extLst>
+  </p:cSld>
+  <p:clrMapOvr>
+    <a:masterClrMapping/>
+  </p:clrMapOvr>
+</p:sld>
+</file>
+
+<file path=ppt/slides/slide3.xml><?xml version="1.0" encoding="utf-8"?>
+<p:sld xmlns:a="http://schemas.openxmlformats.org/drawingml/2006/main" xmlns:r="http://schemas.openxmlformats.org/officeDocument/2006/relationships" xmlns:p="http://schemas.openxmlformats.org/presentationml/2006/main">
+  <p:cSld>
+    <p:spTree>
+      <p:nvGrpSpPr>
+        <p:cNvPr id="1" name=""/>
+        <p:cNvGrpSpPr/>
+        <p:nvPr/>
+      </p:nvGrpSpPr>
+      <p:grpSpPr>
+        <a:xfrm>
+          <a:off x="0" y="0"/>
+          <a:ext cx="0" cy="0"/>
+          <a:chOff x="0" y="0"/>
+          <a:chExt cx="0" cy="0"/>
+        </a:xfrm>
+      </p:grpSpPr>
+      <p:sp>
+        <p:nvSpPr>
+          <p:cNvPr id="2" name="Title 1">
+            <a:extLst>
+              <a:ext uri="{FF2B5EF4-FFF2-40B4-BE49-F238E27FC236}">
+                <a16:creationId xmlns:a16="http://schemas.microsoft.com/office/drawing/2014/main" id="{21B2B337-4594-728E-9807-0F7A04A9A00D}"/>
+              </a:ext>
+            </a:extLst>
+          </p:cNvPr>
+          <p:cNvSpPr>
+            <a:spLocks noGrp="1"/>
+          </p:cNvSpPr>
+          <p:nvPr>
+            <p:ph type="ctrTitle"/>
+          </p:nvPr>
+        </p:nvSpPr>
+        <p:spPr/>
+        <p:txBody>
+          <a:bodyPr/>
+          <a:lstStyle/>
+          <a:p>
+            <a:r>
+              <a:rPr lang="en-US" dirty="0"/>
+              <a:t>Supplementary Figures</a:t>
+            </a:r>
+          </a:p>
+        </p:txBody>
+      </p:sp>
+      <p:sp>
+        <p:nvSpPr>
+          <p:cNvPr id="3" name="Subtitle 2">
+            <a:extLst>
+              <a:ext uri="{FF2B5EF4-FFF2-40B4-BE49-F238E27FC236}">
+                <a16:creationId xmlns:a16="http://schemas.microsoft.com/office/drawing/2014/main" id="{C44CE9B4-FE41-DA3F-B756-BBFB9E341ABA}"/>
+              </a:ext>
+            </a:extLst>
+          </p:cNvPr>
+          <p:cNvSpPr>
+            <a:spLocks noGrp="1"/>
+          </p:cNvSpPr>
+          <p:nvPr>
+            <p:ph type="subTitle" idx="1"/>
+          </p:nvPr>
+        </p:nvSpPr>
+        <p:spPr/>
+        <p:txBody>
+          <a:bodyPr/>
+          <a:lstStyle/>
+          <a:p>
+            <a:endParaRPr lang="en-US"/>
+          </a:p>
+        </p:txBody>
+      </p:sp>
+    </p:spTree>
+    <p:extLst>
+      <p:ext uri="{BB962C8B-B14F-4D97-AF65-F5344CB8AC3E}">
+        <p14:creationId xmlns:p14="http://schemas.microsoft.com/office/powerpoint/2010/main" val="884512018"/>
+      </p:ext>
+    </p:extLst>
+  </p:cSld>
+  <p:clrMapOvr>
+    <a:masterClrMapping/>
+  </p:clrMapOvr>
+</p:sld>
+</file>
+
+<file path=ppt/slides/slide4.xml><?xml version="1.0" encoding="utf-8"?>
+<p:sld xmlns:a="http://schemas.openxmlformats.org/drawingml/2006/main" xmlns:r="http://schemas.openxmlformats.org/officeDocument/2006/relationships" xmlns:p="http://schemas.openxmlformats.org/presentationml/2006/main">
+  <p:cSld>
+    <p:spTree>
+      <p:nvGrpSpPr>
+        <p:cNvPr id="1" name=""/>
+        <p:cNvGrpSpPr/>
+        <p:nvPr/>
+      </p:nvGrpSpPr>
+      <p:grpSpPr>
+        <a:xfrm>
+          <a:off x="0" y="0"/>
+          <a:ext cx="0" cy="0"/>
+          <a:chOff x="0" y="0"/>
+          <a:chExt cx="0" cy="0"/>
+        </a:xfrm>
+      </p:grpSpPr>
+      <p:pic>
+        <p:nvPicPr>
+          <p:cNvPr id="5" name="Picture 4" descr="A picture containing text, screenshot, line, pattern&#10;&#10;Description automatically generated">
+            <a:extLst>
+              <a:ext uri="{FF2B5EF4-FFF2-40B4-BE49-F238E27FC236}">
+                <a16:creationId xmlns:a16="http://schemas.microsoft.com/office/drawing/2014/main" id="{ED107F6D-1FE6-341A-3F70-F385760FEF02}"/>
+              </a:ext>
+            </a:extLst>
+          </p:cNvPr>
+          <p:cNvPicPr>
+            <a:picLocks noChangeAspect="1"/>
+          </p:cNvPicPr>
+          <p:nvPr/>
+        </p:nvPicPr>
+        <p:blipFill rotWithShape="1">
+          <a:blip r:embed="rId2"/>
+          <a:srcRect l="5154" b="4128"/>
+          <a:stretch/>
+        </p:blipFill>
+        <p:spPr>
+          <a:xfrm>
+            <a:off x="1888066" y="533400"/>
+            <a:ext cx="4673599" cy="5211184"/>
+          </a:xfrm>
+          <a:prstGeom prst="rect">
+            <a:avLst/>
+          </a:prstGeom>
+        </p:spPr>
+      </p:pic>
+      <p:sp>
+        <p:nvSpPr>
+          <p:cNvPr id="6" name="Rectangle 5">
+            <a:extLst>
+              <a:ext uri="{FF2B5EF4-FFF2-40B4-BE49-F238E27FC236}">
+                <a16:creationId xmlns:a16="http://schemas.microsoft.com/office/drawing/2014/main" id="{788DA276-24F3-786A-C650-13C0D940CE65}"/>
+              </a:ext>
+            </a:extLst>
+          </p:cNvPr>
+          <p:cNvSpPr/>
+          <p:nvPr/>
+        </p:nvSpPr>
+        <p:spPr>
+          <a:xfrm>
+            <a:off x="1820333" y="3640667"/>
+            <a:ext cx="135467" cy="1600200"/>
+          </a:xfrm>
+          <a:prstGeom prst="rect">
+            <a:avLst/>
+          </a:prstGeom>
+          <a:solidFill>
+            <a:schemeClr val="bg1"/>
+          </a:solidFill>
+          <a:ln>
+            <a:noFill/>
+          </a:ln>
+        </p:spPr>
+        <p:style>
+          <a:lnRef idx="2">
+            <a:schemeClr val="accent1">
+              <a:shade val="50000"/>
+            </a:schemeClr>
+          </a:lnRef>
+          <a:fillRef idx="1">
+            <a:schemeClr val="accent1"/>
+          </a:fillRef>
+          <a:effectRef idx="0">
+            <a:schemeClr val="accent1"/>
+          </a:effectRef>
+          <a:fontRef idx="minor">
+            <a:schemeClr val="lt1"/>
+          </a:fontRef>
+        </p:style>
+        <p:txBody>
+          <a:bodyPr rtlCol="0" anchor="ctr"/>
+          <a:lstStyle/>
+          <a:p>
+            <a:pPr algn="ctr"/>
+            <a:endParaRPr lang="en-US"/>
+          </a:p>
+        </p:txBody>
+      </p:sp>
+      <p:sp>
+        <p:nvSpPr>
+          <p:cNvPr id="7" name="TextBox 6">
+            <a:extLst>
+              <a:ext uri="{FF2B5EF4-FFF2-40B4-BE49-F238E27FC236}">
+                <a16:creationId xmlns:a16="http://schemas.microsoft.com/office/drawing/2014/main" id="{C8045228-C8EC-2B41-6467-E586D67AD25A}"/>
+              </a:ext>
+            </a:extLst>
+          </p:cNvPr>
+          <p:cNvSpPr txBox="1"/>
+          <p:nvPr/>
+        </p:nvSpPr>
+        <p:spPr>
+          <a:xfrm>
+            <a:off x="3466869" y="5744584"/>
+            <a:ext cx="1515992" cy="307777"/>
+          </a:xfrm>
+          <a:prstGeom prst="rect">
+            <a:avLst/>
+          </a:prstGeom>
+          <a:noFill/>
+        </p:spPr>
+        <p:txBody>
+          <a:bodyPr wrap="none" rtlCol="0">
+            <a:spAutoFit/>
+          </a:bodyPr>
+          <a:lstStyle/>
+          <a:p>
+            <a:r>
+              <a:rPr lang="en-US" sz="1400" dirty="0"/>
+              <a:t>Nucleus area (um)</a:t>
+            </a:r>
+          </a:p>
+        </p:txBody>
+      </p:sp>
+      <p:sp>
+        <p:nvSpPr>
+          <p:cNvPr id="8" name="TextBox 7">
+            <a:extLst>
+              <a:ext uri="{FF2B5EF4-FFF2-40B4-BE49-F238E27FC236}">
+                <a16:creationId xmlns:a16="http://schemas.microsoft.com/office/drawing/2014/main" id="{37C6FB0E-2BB9-DFD2-8E1A-D2B291205E73}"/>
+              </a:ext>
+            </a:extLst>
+          </p:cNvPr>
+          <p:cNvSpPr txBox="1"/>
+          <p:nvPr/>
+        </p:nvSpPr>
+        <p:spPr>
+          <a:xfrm rot="16200000">
+            <a:off x="1009054" y="2985103"/>
+            <a:ext cx="1314784" cy="307777"/>
+          </a:xfrm>
+          <a:prstGeom prst="rect">
+            <a:avLst/>
+          </a:prstGeom>
+          <a:noFill/>
+        </p:spPr>
+        <p:txBody>
+          <a:bodyPr wrap="none" rtlCol="0">
+            <a:spAutoFit/>
+          </a:bodyPr>
+          <a:lstStyle/>
+          <a:p>
+            <a:r>
+              <a:rPr lang="en-US" sz="1400" dirty="0"/>
+              <a:t>Cell Density bin</a:t>
+            </a:r>
+          </a:p>
+        </p:txBody>
+      </p:sp>
+      <p:sp>
+        <p:nvSpPr>
+          <p:cNvPr id="9" name="TextBox 8">
+            <a:extLst>
+              <a:ext uri="{FF2B5EF4-FFF2-40B4-BE49-F238E27FC236}">
+                <a16:creationId xmlns:a16="http://schemas.microsoft.com/office/drawing/2014/main" id="{F798D7D1-FE76-8098-EF6D-15CBFF8EE0F0}"/>
+              </a:ext>
+            </a:extLst>
+          </p:cNvPr>
+          <p:cNvSpPr txBox="1"/>
+          <p:nvPr/>
+        </p:nvSpPr>
+        <p:spPr>
+          <a:xfrm>
+            <a:off x="9025667" y="6052361"/>
+            <a:ext cx="2406621" cy="369332"/>
+          </a:xfrm>
+          <a:prstGeom prst="rect">
+            <a:avLst/>
+          </a:prstGeom>
+          <a:noFill/>
+        </p:spPr>
+        <p:txBody>
+          <a:bodyPr wrap="none" rtlCol="0">
+            <a:spAutoFit/>
+          </a:bodyPr>
+          <a:lstStyle/>
+          <a:p>
+            <a:r>
+              <a:rPr lang="en-US" dirty="0" err="1"/>
+              <a:t>SI_Ploidy_Area_Density</a:t>
+            </a:r>
+            <a:endParaRPr lang="en-US" dirty="0"/>
+          </a:p>
+        </p:txBody>
+      </p:sp>
+      <p:pic>
+        <p:nvPicPr>
+          <p:cNvPr id="11" name="Picture 10" descr="A red and blue squares&#10;&#10;Description automatically generated with low confidence">
+            <a:extLst>
+              <a:ext uri="{FF2B5EF4-FFF2-40B4-BE49-F238E27FC236}">
+                <a16:creationId xmlns:a16="http://schemas.microsoft.com/office/drawing/2014/main" id="{1FC16428-C667-A657-6FB6-E7CDE26F55BA}"/>
+              </a:ext>
+            </a:extLst>
+          </p:cNvPr>
+          <p:cNvPicPr>
+            <a:picLocks noChangeAspect="1"/>
+          </p:cNvPicPr>
+          <p:nvPr/>
+        </p:nvPicPr>
+        <p:blipFill>
+          <a:blip r:embed="rId3"/>
+          <a:stretch>
+            <a:fillRect/>
+          </a:stretch>
+        </p:blipFill>
+        <p:spPr>
+          <a:xfrm>
+            <a:off x="5773936" y="752884"/>
+            <a:ext cx="549246" cy="473488"/>
+          </a:xfrm>
+          <a:prstGeom prst="rect">
+            <a:avLst/>
+          </a:prstGeom>
+        </p:spPr>
+      </p:pic>
+    </p:spTree>
+    <p:extLst>
+      <p:ext uri="{BB962C8B-B14F-4D97-AF65-F5344CB8AC3E}">
+        <p14:creationId xmlns:p14="http://schemas.microsoft.com/office/powerpoint/2010/main" val="684732324"/>
+      </p:ext>
+    </p:extLst>
+  </p:cSld>
+  <p:clrMapOvr>
+    <a:masterClrMapping/>
+  </p:clrMapOvr>
+</p:sld>
+</file>
+
+<file path=ppt/slides/slide5.xml><?xml version="1.0" encoding="utf-8"?>
+<p:sld xmlns:a="http://schemas.openxmlformats.org/drawingml/2006/main" xmlns:r="http://schemas.openxmlformats.org/officeDocument/2006/relationships" xmlns:p="http://schemas.openxmlformats.org/presentationml/2006/main">
+  <p:cSld>
+    <p:spTree>
+      <p:nvGrpSpPr>
+        <p:cNvPr id="1" name=""/>
+        <p:cNvGrpSpPr/>
+        <p:nvPr/>
+      </p:nvGrpSpPr>
+      <p:grpSpPr>
+        <a:xfrm>
+          <a:off x="0" y="0"/>
+          <a:ext cx="0" cy="0"/>
+          <a:chOff x="0" y="0"/>
+          <a:chExt cx="0" cy="0"/>
+        </a:xfrm>
+      </p:grpSpPr>
+      <p:pic>
+        <p:nvPicPr>
+          <p:cNvPr id="8" name="Picture 7">
+            <a:extLst>
+              <a:ext uri="{FF2B5EF4-FFF2-40B4-BE49-F238E27FC236}">
+                <a16:creationId xmlns:a16="http://schemas.microsoft.com/office/drawing/2014/main" id="{116F4319-CE44-BA80-B765-B2EE245F5C38}"/>
+              </a:ext>
+            </a:extLst>
+          </p:cNvPr>
+          <p:cNvPicPr>
+            <a:picLocks noChangeAspect="1"/>
+          </p:cNvPicPr>
+          <p:nvPr/>
+        </p:nvPicPr>
+        <p:blipFill>
+          <a:blip r:embed="rId2"/>
+          <a:stretch>
+            <a:fillRect/>
+          </a:stretch>
+        </p:blipFill>
+        <p:spPr>
+          <a:xfrm>
+            <a:off x="2051565" y="170062"/>
+            <a:ext cx="2743200" cy="5486400"/>
+          </a:xfrm>
+          <a:prstGeom prst="rect">
+            <a:avLst/>
+          </a:prstGeom>
+        </p:spPr>
+      </p:pic>
+      <p:pic>
+        <p:nvPicPr>
+          <p:cNvPr id="11" name="Picture 10">
+            <a:extLst>
+              <a:ext uri="{FF2B5EF4-FFF2-40B4-BE49-F238E27FC236}">
+                <a16:creationId xmlns:a16="http://schemas.microsoft.com/office/drawing/2014/main" id="{A7EDCA7E-3F04-6A25-3E7D-BD1963245C48}"/>
+              </a:ext>
+            </a:extLst>
+          </p:cNvPr>
+          <p:cNvPicPr>
+            <a:picLocks noChangeAspect="1"/>
+          </p:cNvPicPr>
+          <p:nvPr/>
+        </p:nvPicPr>
+        <p:blipFill>
+          <a:blip r:embed="rId3"/>
+          <a:stretch>
+            <a:fillRect/>
+          </a:stretch>
+        </p:blipFill>
+        <p:spPr>
+          <a:xfrm>
+            <a:off x="4794765" y="170062"/>
+            <a:ext cx="2743200" cy="5486400"/>
+          </a:xfrm>
+          <a:prstGeom prst="rect">
+            <a:avLst/>
+          </a:prstGeom>
+        </p:spPr>
+      </p:pic>
+      <p:pic>
+        <p:nvPicPr>
+          <p:cNvPr id="14" name="Picture 13" descr="A black text on a white background&#10;&#10;Description automatically generated with low confidence">
+            <a:extLst>
+              <a:ext uri="{FF2B5EF4-FFF2-40B4-BE49-F238E27FC236}">
+                <a16:creationId xmlns:a16="http://schemas.microsoft.com/office/drawing/2014/main" id="{D212659C-4103-C26C-EDA3-D16CEE3F35A8}"/>
+              </a:ext>
+            </a:extLst>
+          </p:cNvPr>
+          <p:cNvPicPr>
+            <a:picLocks noChangeAspect="1"/>
+          </p:cNvPicPr>
+          <p:nvPr/>
+        </p:nvPicPr>
+        <p:blipFill>
+          <a:blip r:embed="rId4"/>
+          <a:stretch>
+            <a:fillRect/>
+          </a:stretch>
+        </p:blipFill>
+        <p:spPr>
+          <a:xfrm rot="16200000">
+            <a:off x="908888" y="822722"/>
+            <a:ext cx="1641025" cy="644329"/>
+          </a:xfrm>
+          <a:prstGeom prst="rect">
+            <a:avLst/>
+          </a:prstGeom>
+        </p:spPr>
+        <p:style>
+          <a:lnRef idx="2">
+            <a:schemeClr val="dk1"/>
+          </a:lnRef>
+          <a:fillRef idx="1">
+            <a:schemeClr val="lt1"/>
+          </a:fillRef>
+          <a:effectRef idx="0">
+            <a:schemeClr val="dk1"/>
+          </a:effectRef>
+          <a:fontRef idx="minor">
+            <a:schemeClr val="dk1"/>
+          </a:fontRef>
+        </p:style>
+      </p:pic>
+      <p:sp>
+        <p:nvSpPr>
+          <p:cNvPr id="15" name="TextBox 14">
+            <a:extLst>
+              <a:ext uri="{FF2B5EF4-FFF2-40B4-BE49-F238E27FC236}">
+                <a16:creationId xmlns:a16="http://schemas.microsoft.com/office/drawing/2014/main" id="{F5ABA60C-1216-7E71-9B3D-1FDEEA041E39}"/>
+              </a:ext>
+            </a:extLst>
+          </p:cNvPr>
+          <p:cNvSpPr txBox="1"/>
+          <p:nvPr/>
+        </p:nvSpPr>
+        <p:spPr>
+          <a:xfrm>
+            <a:off x="10017303" y="6318606"/>
+            <a:ext cx="1980607" cy="369332"/>
+          </a:xfrm>
+          <a:prstGeom prst="rect">
+            <a:avLst/>
+          </a:prstGeom>
+          <a:noFill/>
+        </p:spPr>
+        <p:txBody>
+          <a:bodyPr wrap="none" rtlCol="0">
+            <a:spAutoFit/>
+          </a:bodyPr>
+          <a:lstStyle/>
+          <a:p>
+            <a:r>
+              <a:rPr lang="en-US" dirty="0" err="1"/>
+              <a:t>SI_GDSC_vs_ploidy</a:t>
+            </a:r>
+            <a:endParaRPr lang="en-US" dirty="0"/>
+          </a:p>
+        </p:txBody>
+      </p:sp>
+      <p:pic>
+        <p:nvPicPr>
+          <p:cNvPr id="16" name="Picture 15">
+            <a:extLst>
+              <a:ext uri="{FF2B5EF4-FFF2-40B4-BE49-F238E27FC236}">
+                <a16:creationId xmlns:a16="http://schemas.microsoft.com/office/drawing/2014/main" id="{A52870EE-BA07-B297-2F0C-2D494F4477E6}"/>
+              </a:ext>
+            </a:extLst>
+          </p:cNvPr>
+          <p:cNvPicPr>
+            <a:picLocks noChangeAspect="1"/>
+          </p:cNvPicPr>
+          <p:nvPr/>
+        </p:nvPicPr>
+        <p:blipFill>
+          <a:blip r:embed="rId5"/>
+          <a:stretch>
+            <a:fillRect/>
+          </a:stretch>
+        </p:blipFill>
+        <p:spPr>
+          <a:xfrm>
+            <a:off x="7359721" y="170062"/>
+            <a:ext cx="2743200" cy="5486400"/>
+          </a:xfrm>
+          <a:prstGeom prst="rect">
+            <a:avLst/>
+          </a:prstGeom>
+        </p:spPr>
+      </p:pic>
+    </p:spTree>
+    <p:extLst>
+      <p:ext uri="{BB962C8B-B14F-4D97-AF65-F5344CB8AC3E}">
+        <p14:creationId xmlns:p14="http://schemas.microsoft.com/office/powerpoint/2010/main" val="950340936"/>
+      </p:ext>
+    </p:extLst>
+  </p:cSld>
+  <p:clrMapOvr>
+    <a:masterClrMapping/>
+  </p:clrMapOvr>
+</p:sld>
+</file>
+
+<file path=ppt/slides/slide6.xml><?xml version="1.0" encoding="utf-8"?>
+<p:sld xmlns:a="http://schemas.openxmlformats.org/drawingml/2006/main" xmlns:r="http://schemas.openxmlformats.org/officeDocument/2006/relationships" xmlns:p="http://schemas.openxmlformats.org/presentationml/2006/main">
+  <p:cSld>
+    <p:spTree>
+      <p:nvGrpSpPr>
+        <p:cNvPr id="1" name=""/>
+        <p:cNvGrpSpPr/>
+        <p:nvPr/>
+      </p:nvGrpSpPr>
+      <p:grpSpPr>
+        <a:xfrm>
+          <a:off x="0" y="0"/>
+          <a:ext cx="0" cy="0"/>
+          <a:chOff x="0" y="0"/>
+          <a:chExt cx="0" cy="0"/>
+        </a:xfrm>
+      </p:grpSpPr>
+      <p:pic>
+        <p:nvPicPr>
+          <p:cNvPr id="5" name="Picture 4" descr="A picture containing text, number, screenshot, font&#10;&#10;Description automatically generated">
+            <a:extLst>
+              <a:ext uri="{FF2B5EF4-FFF2-40B4-BE49-F238E27FC236}">
+                <a16:creationId xmlns:a16="http://schemas.microsoft.com/office/drawing/2014/main" id="{79B58AD3-9479-BFB2-D7B0-3528A4D38EB5}"/>
+              </a:ext>
+            </a:extLst>
+          </p:cNvPr>
+          <p:cNvPicPr>
+            <a:picLocks noChangeAspect="1"/>
+          </p:cNvPicPr>
+          <p:nvPr/>
+        </p:nvPicPr>
+        <p:blipFill rotWithShape="1">
+          <a:blip r:embed="rId2"/>
+          <a:srcRect t="420"/>
+          <a:stretch/>
+        </p:blipFill>
+        <p:spPr>
+          <a:xfrm>
+            <a:off x="5782567" y="533114"/>
+            <a:ext cx="3873500" cy="3009900"/>
+          </a:xfrm>
+          <a:prstGeom prst="rect">
+            <a:avLst/>
+          </a:prstGeom>
+        </p:spPr>
+      </p:pic>
+      <p:pic>
+        <p:nvPicPr>
+          <p:cNvPr id="7" name="Picture 6" descr="A picture containing text, number, screenshot, font&#10;&#10;Description automatically generated">
+            <a:extLst>
+              <a:ext uri="{FF2B5EF4-FFF2-40B4-BE49-F238E27FC236}">
+                <a16:creationId xmlns:a16="http://schemas.microsoft.com/office/drawing/2014/main" id="{F083F613-6918-26E6-4597-C8E1DBD6788D}"/>
+              </a:ext>
+            </a:extLst>
+          </p:cNvPr>
+          <p:cNvPicPr>
+            <a:picLocks noChangeAspect="1"/>
+          </p:cNvPicPr>
+          <p:nvPr/>
+        </p:nvPicPr>
+        <p:blipFill>
+          <a:blip r:embed="rId3"/>
+          <a:stretch>
+            <a:fillRect/>
+          </a:stretch>
+        </p:blipFill>
+        <p:spPr>
+          <a:xfrm>
+            <a:off x="701353" y="618233"/>
+            <a:ext cx="3987800" cy="3009900"/>
+          </a:xfrm>
+          <a:prstGeom prst="rect">
+            <a:avLst/>
+          </a:prstGeom>
+        </p:spPr>
+      </p:pic>
+      <p:sp>
+        <p:nvSpPr>
+          <p:cNvPr id="9" name="TextBox 8">
+            <a:extLst>
+              <a:ext uri="{FF2B5EF4-FFF2-40B4-BE49-F238E27FC236}">
+                <a16:creationId xmlns:a16="http://schemas.microsoft.com/office/drawing/2014/main" id="{B956F3EE-3596-51E0-DC9D-A10F0DC0EF00}"/>
+              </a:ext>
+            </a:extLst>
+          </p:cNvPr>
+          <p:cNvSpPr txBox="1"/>
+          <p:nvPr/>
+        </p:nvSpPr>
+        <p:spPr>
+          <a:xfrm>
+            <a:off x="452918" y="5517490"/>
+            <a:ext cx="2242335" cy="369332"/>
+          </a:xfrm>
+          <a:prstGeom prst="rect">
+            <a:avLst/>
+          </a:prstGeom>
+          <a:noFill/>
+        </p:spPr>
+        <p:txBody>
+          <a:bodyPr wrap="square">
+            <a:spAutoFit/>
+          </a:bodyPr>
+          <a:lstStyle/>
+          <a:p>
+            <a:r>
+              <a:rPr lang="en-US" dirty="0" err="1"/>
+              <a:t>SI_GDSC_vs_ploidy_A</a:t>
+            </a:r>
+            <a:endParaRPr lang="en-US" dirty="0"/>
+          </a:p>
+        </p:txBody>
+      </p:sp>
+      <p:sp>
+        <p:nvSpPr>
+          <p:cNvPr id="11" name="TextBox 10">
+            <a:extLst>
+              <a:ext uri="{FF2B5EF4-FFF2-40B4-BE49-F238E27FC236}">
+                <a16:creationId xmlns:a16="http://schemas.microsoft.com/office/drawing/2014/main" id="{17B5664D-4122-D51E-418B-584215DC3684}"/>
+              </a:ext>
+            </a:extLst>
+          </p:cNvPr>
+          <p:cNvSpPr txBox="1"/>
+          <p:nvPr/>
+        </p:nvSpPr>
+        <p:spPr>
+          <a:xfrm>
+            <a:off x="6096000" y="5517490"/>
+            <a:ext cx="2468366" cy="369332"/>
+          </a:xfrm>
+          <a:prstGeom prst="rect">
+            <a:avLst/>
+          </a:prstGeom>
+          <a:noFill/>
+        </p:spPr>
+        <p:txBody>
+          <a:bodyPr wrap="square">
+            <a:spAutoFit/>
+          </a:bodyPr>
+          <a:lstStyle/>
+          <a:p>
+            <a:r>
+              <a:rPr lang="en-US" dirty="0" err="1"/>
+              <a:t>SI_GDSC_vs_ploidy_B</a:t>
+            </a:r>
+            <a:endParaRPr lang="en-US" dirty="0"/>
+          </a:p>
+        </p:txBody>
+      </p:sp>
+    </p:spTree>
+    <p:extLst>
+      <p:ext uri="{BB962C8B-B14F-4D97-AF65-F5344CB8AC3E}">
+        <p14:creationId xmlns:p14="http://schemas.microsoft.com/office/powerpoint/2010/main" val="3342259887"/>
       </p:ext>
     </p:extLst>
   </p:cSld>

--- a/Figs/GemcitabinePaper_Figures.pptx
+++ b/Figs/GemcitabinePaper_Figures.pptx
@@ -264,7 +264,7 @@
           <a:p>
             <a:fld id="{FA5DAE86-69C4-0D4D-B54F-2D0B7B3FA500}" type="datetimeFigureOut">
               <a:rPr lang="en-US" smtClean="0"/>
-              <a:t>5/17/23</a:t>
+              <a:t>5/25/23</a:t>
             </a:fld>
             <a:endParaRPr lang="en-US"/>
           </a:p>
@@ -462,7 +462,7 @@
           <a:p>
             <a:fld id="{FA5DAE86-69C4-0D4D-B54F-2D0B7B3FA500}" type="datetimeFigureOut">
               <a:rPr lang="en-US" smtClean="0"/>
-              <a:t>5/17/23</a:t>
+              <a:t>5/25/23</a:t>
             </a:fld>
             <a:endParaRPr lang="en-US"/>
           </a:p>
@@ -670,7 +670,7 @@
           <a:p>
             <a:fld id="{FA5DAE86-69C4-0D4D-B54F-2D0B7B3FA500}" type="datetimeFigureOut">
               <a:rPr lang="en-US" smtClean="0"/>
-              <a:t>5/17/23</a:t>
+              <a:t>5/25/23</a:t>
             </a:fld>
             <a:endParaRPr lang="en-US"/>
           </a:p>
@@ -868,7 +868,7 @@
           <a:p>
             <a:fld id="{FA5DAE86-69C4-0D4D-B54F-2D0B7B3FA500}" type="datetimeFigureOut">
               <a:rPr lang="en-US" smtClean="0"/>
-              <a:t>5/17/23</a:t>
+              <a:t>5/25/23</a:t>
             </a:fld>
             <a:endParaRPr lang="en-US"/>
           </a:p>
@@ -1143,7 +1143,7 @@
           <a:p>
             <a:fld id="{FA5DAE86-69C4-0D4D-B54F-2D0B7B3FA500}" type="datetimeFigureOut">
               <a:rPr lang="en-US" smtClean="0"/>
-              <a:t>5/17/23</a:t>
+              <a:t>5/25/23</a:t>
             </a:fld>
             <a:endParaRPr lang="en-US"/>
           </a:p>
@@ -1408,7 +1408,7 @@
           <a:p>
             <a:fld id="{FA5DAE86-69C4-0D4D-B54F-2D0B7B3FA500}" type="datetimeFigureOut">
               <a:rPr lang="en-US" smtClean="0"/>
-              <a:t>5/17/23</a:t>
+              <a:t>5/25/23</a:t>
             </a:fld>
             <a:endParaRPr lang="en-US"/>
           </a:p>
@@ -1820,7 +1820,7 @@
           <a:p>
             <a:fld id="{FA5DAE86-69C4-0D4D-B54F-2D0B7B3FA500}" type="datetimeFigureOut">
               <a:rPr lang="en-US" smtClean="0"/>
-              <a:t>5/17/23</a:t>
+              <a:t>5/25/23</a:t>
             </a:fld>
             <a:endParaRPr lang="en-US"/>
           </a:p>
@@ -1961,7 +1961,7 @@
           <a:p>
             <a:fld id="{FA5DAE86-69C4-0D4D-B54F-2D0B7B3FA500}" type="datetimeFigureOut">
               <a:rPr lang="en-US" smtClean="0"/>
-              <a:t>5/17/23</a:t>
+              <a:t>5/25/23</a:t>
             </a:fld>
             <a:endParaRPr lang="en-US"/>
           </a:p>
@@ -2074,7 +2074,7 @@
           <a:p>
             <a:fld id="{FA5DAE86-69C4-0D4D-B54F-2D0B7B3FA500}" type="datetimeFigureOut">
               <a:rPr lang="en-US" smtClean="0"/>
-              <a:t>5/17/23</a:t>
+              <a:t>5/25/23</a:t>
             </a:fld>
             <a:endParaRPr lang="en-US"/>
           </a:p>
@@ -2385,7 +2385,7 @@
           <a:p>
             <a:fld id="{FA5DAE86-69C4-0D4D-B54F-2D0B7B3FA500}" type="datetimeFigureOut">
               <a:rPr lang="en-US" smtClean="0"/>
-              <a:t>5/17/23</a:t>
+              <a:t>5/25/23</a:t>
             </a:fld>
             <a:endParaRPr lang="en-US"/>
           </a:p>
@@ -2673,7 +2673,7 @@
           <a:p>
             <a:fld id="{FA5DAE86-69C4-0D4D-B54F-2D0B7B3FA500}" type="datetimeFigureOut">
               <a:rPr lang="en-US" smtClean="0"/>
-              <a:t>5/17/23</a:t>
+              <a:t>5/25/23</a:t>
             </a:fld>
             <a:endParaRPr lang="en-US"/>
           </a:p>
@@ -2914,7 +2914,7 @@
           <a:p>
             <a:fld id="{FA5DAE86-69C4-0D4D-B54F-2D0B7B3FA500}" type="datetimeFigureOut">
               <a:rPr lang="en-US" smtClean="0"/>
-              <a:t>5/17/23</a:t>
+              <a:t>5/25/23</a:t>
             </a:fld>
             <a:endParaRPr lang="en-US"/>
           </a:p>
@@ -3416,10 +3416,10 @@
       </p:grpSpPr>
       <p:pic>
         <p:nvPicPr>
-          <p:cNvPr id="7" name="Picture 6" descr="A picture containing line, diagram, plot, text&#10;&#10;Description automatically generated">
-            <a:extLst>
-              <a:ext uri="{FF2B5EF4-FFF2-40B4-BE49-F238E27FC236}">
-                <a16:creationId xmlns:a16="http://schemas.microsoft.com/office/drawing/2014/main" id="{51A85AAB-8E78-0D99-F691-62A3A2030E57}"/>
+          <p:cNvPr id="8" name="Picture 7" descr="A picture containing text, screenshot, diagram, number&#10;&#10;Description automatically generated">
+            <a:extLst>
+              <a:ext uri="{FF2B5EF4-FFF2-40B4-BE49-F238E27FC236}">
+                <a16:creationId xmlns:a16="http://schemas.microsoft.com/office/drawing/2014/main" id="{BAFC3FDD-FAF7-B56A-548C-244ACC7825D9}"/>
               </a:ext>
             </a:extLst>
           </p:cNvPr>
@@ -3428,15 +3428,16 @@
           </p:cNvPicPr>
           <p:nvPr/>
         </p:nvPicPr>
-        <p:blipFill rotWithShape="1">
+        <p:blipFill>
           <a:blip r:embed="rId2"/>
-          <a:srcRect/>
-          <a:stretch/>
+          <a:stretch>
+            <a:fillRect/>
+          </a:stretch>
         </p:blipFill>
         <p:spPr>
           <a:xfrm>
-            <a:off x="2888849" y="307012"/>
-            <a:ext cx="4657358" cy="2109207"/>
+            <a:off x="2830721" y="2548094"/>
+            <a:ext cx="4812185" cy="4269967"/>
           </a:xfrm>
           <a:prstGeom prst="rect">
             <a:avLst/>
@@ -3445,10 +3446,10 @@
       </p:pic>
       <p:pic>
         <p:nvPicPr>
-          <p:cNvPr id="13" name="Picture 12" descr="A picture containing text, diagram, line, parallel&#10;&#10;Description automatically generated">
-            <a:extLst>
-              <a:ext uri="{FF2B5EF4-FFF2-40B4-BE49-F238E27FC236}">
-                <a16:creationId xmlns:a16="http://schemas.microsoft.com/office/drawing/2014/main" id="{7FAE7665-8391-0F8B-6454-18126D0754C6}"/>
+          <p:cNvPr id="5" name="Picture 4" descr="A picture containing line, diagram, plot, text&#10;&#10;Description automatically generated">
+            <a:extLst>
+              <a:ext uri="{FF2B5EF4-FFF2-40B4-BE49-F238E27FC236}">
+                <a16:creationId xmlns:a16="http://schemas.microsoft.com/office/drawing/2014/main" id="{CCFEA96D-AAA7-6AF5-2049-4625C9DD7400}"/>
               </a:ext>
             </a:extLst>
           </p:cNvPr>
@@ -3465,8 +3466,8 @@
         </p:blipFill>
         <p:spPr>
           <a:xfrm>
-            <a:off x="2888849" y="2616849"/>
-            <a:ext cx="4657358" cy="4116022"/>
+            <a:off x="2940050" y="338883"/>
+            <a:ext cx="4702856" cy="2077335"/>
           </a:xfrm>
           <a:prstGeom prst="rect">
             <a:avLst/>

--- a/Figs/GemcitabinePaper_Figures.pptx
+++ b/Figs/GemcitabinePaper_Figures.pptx
@@ -264,7 +264,7 @@
           <a:p>
             <a:fld id="{FA5DAE86-69C4-0D4D-B54F-2D0B7B3FA500}" type="datetimeFigureOut">
               <a:rPr lang="en-US" smtClean="0"/>
-              <a:t>5/25/23</a:t>
+              <a:t>7/10/23</a:t>
             </a:fld>
             <a:endParaRPr lang="en-US"/>
           </a:p>
@@ -462,7 +462,7 @@
           <a:p>
             <a:fld id="{FA5DAE86-69C4-0D4D-B54F-2D0B7B3FA500}" type="datetimeFigureOut">
               <a:rPr lang="en-US" smtClean="0"/>
-              <a:t>5/25/23</a:t>
+              <a:t>7/10/23</a:t>
             </a:fld>
             <a:endParaRPr lang="en-US"/>
           </a:p>
@@ -670,7 +670,7 @@
           <a:p>
             <a:fld id="{FA5DAE86-69C4-0D4D-B54F-2D0B7B3FA500}" type="datetimeFigureOut">
               <a:rPr lang="en-US" smtClean="0"/>
-              <a:t>5/25/23</a:t>
+              <a:t>7/10/23</a:t>
             </a:fld>
             <a:endParaRPr lang="en-US"/>
           </a:p>
@@ -868,7 +868,7 @@
           <a:p>
             <a:fld id="{FA5DAE86-69C4-0D4D-B54F-2D0B7B3FA500}" type="datetimeFigureOut">
               <a:rPr lang="en-US" smtClean="0"/>
-              <a:t>5/25/23</a:t>
+              <a:t>7/10/23</a:t>
             </a:fld>
             <a:endParaRPr lang="en-US"/>
           </a:p>
@@ -1143,7 +1143,7 @@
           <a:p>
             <a:fld id="{FA5DAE86-69C4-0D4D-B54F-2D0B7B3FA500}" type="datetimeFigureOut">
               <a:rPr lang="en-US" smtClean="0"/>
-              <a:t>5/25/23</a:t>
+              <a:t>7/10/23</a:t>
             </a:fld>
             <a:endParaRPr lang="en-US"/>
           </a:p>
@@ -1408,7 +1408,7 @@
           <a:p>
             <a:fld id="{FA5DAE86-69C4-0D4D-B54F-2D0B7B3FA500}" type="datetimeFigureOut">
               <a:rPr lang="en-US" smtClean="0"/>
-              <a:t>5/25/23</a:t>
+              <a:t>7/10/23</a:t>
             </a:fld>
             <a:endParaRPr lang="en-US"/>
           </a:p>
@@ -1820,7 +1820,7 @@
           <a:p>
             <a:fld id="{FA5DAE86-69C4-0D4D-B54F-2D0B7B3FA500}" type="datetimeFigureOut">
               <a:rPr lang="en-US" smtClean="0"/>
-              <a:t>5/25/23</a:t>
+              <a:t>7/10/23</a:t>
             </a:fld>
             <a:endParaRPr lang="en-US"/>
           </a:p>
@@ -1961,7 +1961,7 @@
           <a:p>
             <a:fld id="{FA5DAE86-69C4-0D4D-B54F-2D0B7B3FA500}" type="datetimeFigureOut">
               <a:rPr lang="en-US" smtClean="0"/>
-              <a:t>5/25/23</a:t>
+              <a:t>7/10/23</a:t>
             </a:fld>
             <a:endParaRPr lang="en-US"/>
           </a:p>
@@ -2074,7 +2074,7 @@
           <a:p>
             <a:fld id="{FA5DAE86-69C4-0D4D-B54F-2D0B7B3FA500}" type="datetimeFigureOut">
               <a:rPr lang="en-US" smtClean="0"/>
-              <a:t>5/25/23</a:t>
+              <a:t>7/10/23</a:t>
             </a:fld>
             <a:endParaRPr lang="en-US"/>
           </a:p>
@@ -2385,7 +2385,7 @@
           <a:p>
             <a:fld id="{FA5DAE86-69C4-0D4D-B54F-2D0B7B3FA500}" type="datetimeFigureOut">
               <a:rPr lang="en-US" smtClean="0"/>
-              <a:t>5/25/23</a:t>
+              <a:t>7/10/23</a:t>
             </a:fld>
             <a:endParaRPr lang="en-US"/>
           </a:p>
@@ -2673,7 +2673,7 @@
           <a:p>
             <a:fld id="{FA5DAE86-69C4-0D4D-B54F-2D0B7B3FA500}" type="datetimeFigureOut">
               <a:rPr lang="en-US" smtClean="0"/>
-              <a:t>5/25/23</a:t>
+              <a:t>7/10/23</a:t>
             </a:fld>
             <a:endParaRPr lang="en-US"/>
           </a:p>
@@ -2914,7 +2914,7 @@
           <a:p>
             <a:fld id="{FA5DAE86-69C4-0D4D-B54F-2D0B7B3FA500}" type="datetimeFigureOut">
               <a:rPr lang="en-US" smtClean="0"/>
-              <a:t>5/25/23</a:t>
+              <a:t>7/10/23</a:t>
             </a:fld>
             <a:endParaRPr lang="en-US"/>
           </a:p>
@@ -3416,10 +3416,10 @@
       </p:grpSpPr>
       <p:pic>
         <p:nvPicPr>
-          <p:cNvPr id="8" name="Picture 7" descr="A picture containing text, screenshot, diagram, number&#10;&#10;Description automatically generated">
-            <a:extLst>
-              <a:ext uri="{FF2B5EF4-FFF2-40B4-BE49-F238E27FC236}">
-                <a16:creationId xmlns:a16="http://schemas.microsoft.com/office/drawing/2014/main" id="{BAFC3FDD-FAF7-B56A-548C-244ACC7825D9}"/>
+          <p:cNvPr id="3" name="Picture 2" descr="A comparison of a number of numbers and a number of numbers&#10;&#10;Description automatically generated">
+            <a:extLst>
+              <a:ext uri="{FF2B5EF4-FFF2-40B4-BE49-F238E27FC236}">
+                <a16:creationId xmlns:a16="http://schemas.microsoft.com/office/drawing/2014/main" id="{C2D046C7-130A-7CE8-0C39-79219346317E}"/>
               </a:ext>
             </a:extLst>
           </p:cNvPr>
@@ -3436,8 +3436,37 @@
         </p:blipFill>
         <p:spPr>
           <a:xfrm>
-            <a:off x="2830721" y="2548094"/>
-            <a:ext cx="4812185" cy="4269967"/>
+            <a:off x="2830721" y="2530299"/>
+            <a:ext cx="4812185" cy="2111275"/>
+          </a:xfrm>
+          <a:prstGeom prst="rect">
+            <a:avLst/>
+          </a:prstGeom>
+        </p:spPr>
+      </p:pic>
+      <p:pic>
+        <p:nvPicPr>
+          <p:cNvPr id="8" name="Picture 7" descr="A picture containing text, screenshot, diagram, number&#10;&#10;Description automatically generated">
+            <a:extLst>
+              <a:ext uri="{FF2B5EF4-FFF2-40B4-BE49-F238E27FC236}">
+                <a16:creationId xmlns:a16="http://schemas.microsoft.com/office/drawing/2014/main" id="{BAFC3FDD-FAF7-B56A-548C-244ACC7825D9}"/>
+              </a:ext>
+            </a:extLst>
+          </p:cNvPr>
+          <p:cNvPicPr>
+            <a:picLocks noChangeAspect="1"/>
+          </p:cNvPicPr>
+          <p:nvPr/>
+        </p:nvPicPr>
+        <p:blipFill rotWithShape="1">
+          <a:blip r:embed="rId3"/>
+          <a:srcRect t="49028"/>
+          <a:stretch/>
+        </p:blipFill>
+        <p:spPr>
+          <a:xfrm>
+            <a:off x="2830721" y="4641574"/>
+            <a:ext cx="4812185" cy="2176487"/>
           </a:xfrm>
           <a:prstGeom prst="rect">
             <a:avLst/>
@@ -3459,7 +3488,7 @@
           <p:nvPr/>
         </p:nvPicPr>
         <p:blipFill>
-          <a:blip r:embed="rId3"/>
+          <a:blip r:embed="rId4"/>
           <a:stretch>
             <a:fillRect/>
           </a:stretch>
